--- a/lectures/week-01/lecture-en.pptx
+++ b/lectures/week-01/lecture-en.pptx
@@ -15631,7 +15631,7 @@
                 </a:solidFill>
                 <a:latin typeface="Source Han Sans SC"/>
               </a:rPr>
-              <a:t>Theory ~90 min · Lab ~75 min · Quiz &amp; Summary 15 min</a:t>
+              <a:t>Theory ~90 min · Lab 80 min · Quiz &amp; Summary 10 min</a:t>
             </a:r>
           </a:p>
         </p:txBody>
